--- a/docs/pptx/entire/ritu-entire-scatter-cg-epi-bmi30.pptx
+++ b/docs/pptx/entire/ritu-entire-scatter-cg-epi-bmi30.pptx
@@ -4760,7 +4760,7 @@
           </p:nvSpPr>
           <p:spPr>
             <a:xfrm>
-              <a:off x="3757867" y="4242157"/>
+              <a:off x="3757871" y="4242156"/>
               <a:ext cx="52362" cy="52362"/>
             </a:xfrm>
             <a:prstGeom prst="ellipse">
@@ -29820,7 +29820,7 @@
           </p:nvSpPr>
           <p:spPr>
             <a:xfrm>
-              <a:off x="7109168" y="3226038"/>
+              <a:off x="7109161" y="3226039"/>
               <a:ext cx="52362" cy="52362"/>
             </a:xfrm>
             <a:prstGeom prst="ellipse">
